--- a/sesiones/sesion-07/sesion-07.pptx
+++ b/sesiones/sesion-07/sesion-07.pptx
@@ -6140,7 +6140,7 @@
                 </a:solidFill>
                 <a:latin typeface="Calibri"/>
               </a:rPr>
-              <a:t>• Esperado: el test encuentra ≥1 violación (eso es éxito de la demo)</a:t>
+              <a:t>• Esperado: pytest FAILED — el gate exige 0 violaciones (assert total == 0)</a:t>
             </a:r>
           </a:p>
           <a:p>
